--- a/docs/미팅_목표1_수치보고.pptx
+++ b/docs/미팅_목표1_수치보고.pptx
@@ -9290,7 +9290,7 @@
                 <a:ea typeface="Calibri" pitchFamily="34" charset="-122"/>
                 <a:cs typeface="Calibri" pitchFamily="34" charset="-120"/>
               </a:rPr>
-              <a:t>원인: MAD repo는 CMM 오디오로 무음 mp4 트랙을 공급(별도 wav 미사용). 침묵을 들은 대비 디코딩이 점수를 얻는 구조 → 실제 wav(Ours 규약)를 넣으면 이득이 사라지고 역전.</a:t>
+              <a:t>원인: 오디오 입력 규약 차이. 재현 실험(우측 장)에서 세 가지 공급 방식에 따라 수치가 52~81pp 폭으로 요동함을 실증 — 이 셀들은 방법이 아니라 입력 규약이 지배.</a:t>
             </a:r>
             <a:endParaRPr lang="en-US" sz="1150" dirty="0"/>
           </a:p>
@@ -9946,7 +9946,7 @@
                 <a:ea typeface="Calibri" pitchFamily="34" charset="-122"/>
                 <a:cs typeface="Calibri" pitchFamily="34" charset="-120"/>
               </a:rPr>
-              <a:t>논문 수치 복원 여부 확인</a:t>
+              <a:t>결과: 57.2 / 52.4</a:t>
             </a:r>
             <a:endParaRPr lang="en-US" sz="1450" dirty="0"/>
           </a:p>
@@ -9985,7 +9985,7 @@
                 <a:ea typeface="Calibri" pitchFamily="34" charset="-122"/>
                 <a:cs typeface="Calibri" pitchFamily="34" charset="-120"/>
               </a:rPr>
-              <a:t>MAD 81.3 / VCD 76.4 예상</a:t>
+              <a:t>복원 실패 — 규약 민감성만 실증</a:t>
             </a:r>
             <a:endParaRPr lang="en-US" sz="1150" dirty="0"/>
           </a:p>
@@ -10002,7 +10002,7 @@
                 <a:ea typeface="Calibri" pitchFamily="34" charset="-122"/>
                 <a:cs typeface="Calibri" pitchFamily="34" charset="-120"/>
               </a:rPr>
-              <a:t>(우리 교정입력: 70.9 / 58.5)</a:t>
+              <a:t>(논문 81.3/76.4 · 교정입력 70.9/58.5)</a:t>
             </a:r>
             <a:endParaRPr lang="en-US" sz="1150" dirty="0"/>
           </a:p>
@@ -10060,13 +10060,13 @@
             <a:r>
               <a:rPr lang="en-US" sz="1500" b="1" dirty="0">
                 <a:solidFill>
-                  <a:srgbClr val="CADCFC"/>
+                  <a:srgbClr val="FFFFFF"/>
                 </a:solidFill>
                 <a:latin typeface="Calibri" pitchFamily="34" charset="0"/>
                 <a:ea typeface="Calibri" pitchFamily="34" charset="-122"/>
                 <a:cs typeface="Calibri" pitchFamily="34" charset="-120"/>
               </a:rPr>
-              <a:t>결과 (실행 중 — 완료 시 기입):   </a:t>
+              <a:t>결과:  MAD CMM 57.2  ·  VCD CMM 52.4  </a:t>
             </a:r>
             <a:pPr indent="0" marL="0">
               <a:lnSpc>
@@ -10075,15 +10075,15 @@
               <a:buNone/>
             </a:pPr>
             <a:r>
-              <a:rPr lang="en-US" sz="1500" b="1" dirty="0">
+              <a:rPr lang="en-US" sz="1500" dirty="0">
                 <a:solidFill>
-                  <a:srgbClr val="FFFFFF"/>
+                  <a:srgbClr val="CADCFC"/>
                 </a:solidFill>
                 <a:latin typeface="Calibri" pitchFamily="34" charset="0"/>
                 <a:ea typeface="Calibri" pitchFamily="34" charset="-122"/>
                 <a:cs typeface="Calibri" pitchFamily="34" charset="-120"/>
               </a:rPr>
-              <a:t>MAD CMM: __ __ . __   ·   VCD CMM: __ __ . __</a:t>
+              <a:t>— 무음 트랙 공급으로는 논문 수치가 복원되지 않음 (원 파이프라인의 정확한 오디오 처리는 미공개 영역)</a:t>
             </a:r>
             <a:pPr indent="0" marL="0">
               <a:lnSpc>
@@ -10109,7 +10109,7 @@
                 <a:ea typeface="Calibri" pitchFamily="34" charset="-122"/>
                 <a:cs typeface="Calibri" pitchFamily="34" charset="-120"/>
               </a:rPr>
-              <a:t>논문 수치에 근접 복원되면 → 격차의 원인이 입력 규약임이 실측으로 종결. 논문 각주 문구: “MAD 논문의 CMM 수치는 무음 mp4 트랙을 오디오로 공급한 설정의 결과로, 교정된 입력에서는 재현되지 않음(재현 실험으로 확인)”</a:t>
+              <a:t>확정된 사실: 같은 코드·하이퍼에서 오디오 공급 방식만 바꿔도 52.4 ~ 81.3 스윙 — VL2 VCD/MAD × CMM은 “입력 규약 지배 셀”. Base·Qwen 셀은 어느 규약에서도 안정(±2pp). → 본 표의 수치(교정 입력 = Ours 규약)가 Ours와의 비교에 유효한 기준.</a:t>
             </a:r>
             <a:endParaRPr lang="en-US" sz="1500" dirty="0"/>
           </a:p>
